--- a/Project/FarmAssist/FarmAssist-Review1.pptx
+++ b/Project/FarmAssist/FarmAssist-Review1.pptx
@@ -4450,7 +4450,7 @@
                 </a:solidFill>
                 <a:latin typeface="Segoe UI"/>
               </a:rPr>
-              <a:t>raw text from the farmer</a:t>
+              <a:t>raw text, exactly as the farmer types it, typos and all</a:t>
             </a:r>
           </a:p>
         </p:txBody>
@@ -4613,7 +4613,7 @@
                 </a:solidFill>
                 <a:latin typeface="Segoe UI"/>
               </a:rPr>
-              <a:t>Edit Distance fixes spelling; a DP splits joined words</a:t>
+              <a:t>Edit Distance fixes the spelling; a word-segmentation DP unsticks joined words, so lateblight becomes late blight</a:t>
             </a:r>
           </a:p>
         </p:txBody>
@@ -4776,7 +4776,7 @@
                 </a:solidFill>
                 <a:latin typeface="Segoe UI"/>
               </a:rPr>
-              <a:t>Aho-Corasick rewrites local names: paddy → rice</a:t>
+              <a:t>a second Aho-Corasick automaton rewrites local and Hindi names: paddy, dhan and chawal all become rice</a:t>
             </a:r>
           </a:p>
         </p:txBody>
@@ -4939,8 +4939,7 @@
                 </a:solidFill>
                 <a:latin typeface="Segoe UI"/>
               </a:rPr>
-              <a:t>one Aho-Corasick pass finds every crop, disease, pest,
-fertilizer and symptom at once</a:t>
+              <a:t>one Aho-Corasick pass over 285 patterns finds every crop, disease, pest, fertilizer and symptom in the sentence at once</a:t>
             </a:r>
           </a:p>
         </p:txBody>
@@ -5103,7 +5102,7 @@
                 </a:solidFill>
                 <a:latin typeface="Segoe UI"/>
               </a:rPr>
-              <a:t>the intent decides which feature answers</a:t>
+              <a:t>the entities found, and the shape of the question, decide which of the nine features answers it</a:t>
             </a:r>
           </a:p>
         </p:txBody>
@@ -5264,8 +5263,7 @@
                 </a:solidFill>
                 <a:latin typeface="Segoe UI"/>
               </a:rPr>
-              <a:t>Knapsack, Bipartite Matching, KMP + QuickSort,
-or Rabin-Karp search with Suffix Array related reading</a:t>
+              <a:t>Knapsack for a budget, Bipartite Matching for many crops, KMP with QuickSort for a diagnosis, or Rabin-Karp search with Suffix Array related reading</a:t>
             </a:r>
           </a:p>
         </p:txBody>
@@ -7652,8 +7650,8 @@
         </p:blipFill>
         <p:spPr>
           <a:xfrm>
-            <a:off x="6400800" y="3703320"/>
-            <a:ext cx="5074920" cy="2930588"/>
+            <a:off x="6400800" y="3840480"/>
+            <a:ext cx="5074920" cy="1620162"/>
           </a:xfrm>
           <a:prstGeom prst="rect">
             <a:avLst/>
